--- a/WebLegacy_AI_Praesentation_V3.pptx
+++ b/WebLegacy_AI_Praesentation_V3.pptx
@@ -6042,7 +6042,7 @@
         <p:spPr>
           <a:xfrm>
             <a:off x="731520" y="457200"/>
-            <a:ext cx="10698480" cy="731520"/>
+            <a:ext cx="10698480" cy="553998"/>
           </a:xfrm>
           <a:prstGeom prst="rect">
             <a:avLst/>
@@ -6064,8 +6064,10 @@
               </a:defRPr>
             </a:pPr>
             <a:r>
-              <a:t>Die Härteprüfung: Der ERP V3 Monolith</a:t>
-            </a:r>
+              <a:rPr lang="de-DE" sz="3600" b="1" dirty="0"/>
+              <a:t>Vom Chaos zur Struktur</a:t>
+            </a:r>
+            <a:endParaRPr dirty="0"/>
           </a:p>
         </p:txBody>
       </p:sp>
@@ -9077,7 +9079,7 @@
         <p:spPr>
           <a:xfrm>
             <a:off x="6217920" y="1691640"/>
-            <a:ext cx="2286000" cy="274320"/>
+            <a:ext cx="723275" cy="261610"/>
           </a:xfrm>
           <a:prstGeom prst="rect">
             <a:avLst/>
@@ -9099,7 +9101,8 @@
               </a:defRPr>
             </a:pPr>
             <a:r>
-              <a:t>main.py (V3-Update)</a:t>
+              <a:rPr dirty="0"/>
+              <a:t>main.py</a:t>
             </a:r>
           </a:p>
         </p:txBody>
@@ -10600,8 +10603,30 @@
               </a:defRPr>
             </a:pPr>
             <a:r>
-              <a:t>2. Validierung als Kernkomponente</a:t>
-            </a:r>
+              <a:rPr dirty="0"/>
+              <a:t>2. </a:t>
+            </a:r>
+            <a:r>
+              <a:rPr dirty="0" err="1"/>
+              <a:t>Validierung</a:t>
+            </a:r>
+            <a:r>
+              <a:rPr dirty="0"/>
+              <a:t> </a:t>
+            </a:r>
+            <a:r>
+              <a:rPr dirty="0" err="1"/>
+              <a:t>als</a:t>
+            </a:r>
+            <a:r>
+              <a:rPr dirty="0"/>
+              <a:t> </a:t>
+            </a:r>
+            <a:r>
+              <a:rPr dirty="0" err="1"/>
+              <a:t>Kernkomponente</a:t>
+            </a:r>
+            <a:endParaRPr dirty="0"/>
           </a:p>
           <a:p>
             <a:pPr>
@@ -10613,7 +10638,56 @@
               </a:defRPr>
             </a:pPr>
             <a:r>
-              <a:t>Die native Cross-Language Test-Engine sichert die Geschäftslogik ab und deckt Abweichungen zwischen PHP-Original und C#-Migration sofort auf.</a:t>
+              <a:rPr dirty="0"/>
+              <a:t>Die native Cross-Language Test-Engine </a:t>
+            </a:r>
+            <a:r>
+              <a:rPr dirty="0" err="1"/>
+              <a:t>sichert</a:t>
+            </a:r>
+            <a:r>
+              <a:rPr dirty="0"/>
+              <a:t> die </a:t>
+            </a:r>
+            <a:r>
+              <a:rPr dirty="0" err="1"/>
+              <a:t>Geschäftslogik</a:t>
+            </a:r>
+            <a:r>
+              <a:rPr dirty="0"/>
+              <a:t> ab und </a:t>
+            </a:r>
+            <a:r>
+              <a:rPr dirty="0" err="1"/>
+              <a:t>deckt</a:t>
+            </a:r>
+            <a:r>
+              <a:rPr dirty="0"/>
+              <a:t> </a:t>
+            </a:r>
+            <a:r>
+              <a:rPr dirty="0" err="1"/>
+              <a:t>Abweichungen</a:t>
+            </a:r>
+            <a:r>
+              <a:rPr dirty="0"/>
+              <a:t> </a:t>
+            </a:r>
+            <a:r>
+              <a:rPr dirty="0" err="1"/>
+              <a:t>zwischen</a:t>
+            </a:r>
+            <a:r>
+              <a:rPr dirty="0"/>
+              <a:t> PHP-Original und C#-Migration </a:t>
+            </a:r>
+            <a:r>
+              <a:rPr dirty="0" err="1"/>
+              <a:t>sofort</a:t>
+            </a:r>
+            <a:r>
+              <a:rPr dirty="0"/>
+              <a:t> auf.</a:t>
             </a:r>
           </a:p>
         </p:txBody>
@@ -10956,11 +11030,13 @@
               <a:t> AI</a:t>
             </a:r>
             <a:r>
-              <a:rPr lang="de-DE"/>
+              <a:rPr lang="de-DE" dirty="0"/>
               <a:t>.</a:t>
             </a:r>
-            <a:br/>
-            <a:endParaRPr/>
+            <a:br>
+              <a:rPr dirty="0"/>
+            </a:br>
+            <a:endParaRPr dirty="0"/>
           </a:p>
         </p:txBody>
       </p:sp>

--- a/WebLegacy_AI_Praesentation_V3.pptx
+++ b/WebLegacy_AI_Praesentation_V3.pptx
@@ -6187,7 +6187,19 @@
               </a:defRPr>
             </a:pPr>
             <a:r>
-              <a:t>1. Spaghetti-Code &amp; Relationale Komplexität</a:t>
+              <a:rPr dirty="0"/>
+              <a:t>1. Spaghetti-Code &amp; </a:t>
+            </a:r>
+            <a:r>
+              <a:rPr dirty="0" err="1"/>
+              <a:t>Relationale</a:t>
+            </a:r>
+            <a:r>
+              <a:rPr dirty="0"/>
+              <a:t> </a:t>
+            </a:r>
+            <a:r>
+              <a:t>Komplexität</a:t>
             </a:r>
           </a:p>
           <a:p>
@@ -6200,7 +6212,64 @@
               </a:defRPr>
             </a:pPr>
             <a:r>
-              <a:t>HTML-Dashboard, Logik und Datenbankabfragen sind wild in PHP vermischt. 9 Tabellen mit komplexen Relationen.</a:t>
+              <a:rPr dirty="0"/>
+              <a:t>HTML-Dashboard, Logik und </a:t>
+            </a:r>
+            <a:r>
+              <a:rPr dirty="0" err="1"/>
+              <a:t>Datenbankabfragen</a:t>
+            </a:r>
+            <a:r>
+              <a:rPr dirty="0"/>
+              <a:t> </a:t>
+            </a:r>
+            <a:r>
+              <a:rPr dirty="0" err="1"/>
+              <a:t>sind</a:t>
+            </a:r>
+            <a:r>
+              <a:rPr dirty="0"/>
+              <a:t> wild in PHP </a:t>
+            </a:r>
+            <a:r>
+              <a:rPr dirty="0" err="1"/>
+              <a:t>vermischt</a:t>
+            </a:r>
+            <a:r>
+              <a:rPr dirty="0"/>
+              <a:t>. 9 </a:t>
+            </a:r>
+            <a:r>
+              <a:rPr dirty="0" err="1"/>
+              <a:t>Tabellen</a:t>
+            </a:r>
+            <a:r>
+              <a:rPr dirty="0"/>
+              <a:t> </a:t>
+            </a:r>
+            <a:r>
+              <a:rPr dirty="0" err="1"/>
+              <a:t>mit</a:t>
+            </a:r>
+            <a:r>
+              <a:rPr dirty="0"/>
+              <a:t> </a:t>
+            </a:r>
+            <a:r>
+              <a:rPr dirty="0" err="1"/>
+              <a:t>komplexen</a:t>
+            </a:r>
+            <a:r>
+              <a:rPr dirty="0"/>
+              <a:t> </a:t>
+            </a:r>
+            <a:r>
+              <a:rPr dirty="0" err="1"/>
+              <a:t>Relationen</a:t>
+            </a:r>
+            <a:r>
+              <a:rPr dirty="0"/>
+              <a:t>.</a:t>
             </a:r>
           </a:p>
         </p:txBody>
